--- a/ClinPharmForum_081826.pptx
+++ b/ClinPharmForum_081826.pptx
@@ -809,7 +809,7 @@
           </a:ln>
           <a:extLst>
             <a:ext uri="{C572A759-6A51-4108-AA02-DFA0A04FC94B}">
-              <ma14:wrappingTextBoxFlag xmlns:ma14="http://schemas.microsoft.com/office/mac/drawingml/2011/main" xmlns:a14="http://schemas.microsoft.com/office/drawing/2010/main" xmlns:m="http://schemas.openxmlformats.org/officeDocument/2006/math" xmlns="" val="1"/>
+              <ma14:wrappingTextBoxFlag xmlns="" xmlns:m="http://schemas.openxmlformats.org/officeDocument/2006/math" xmlns:a14="http://schemas.microsoft.com/office/drawing/2010/main" xmlns:ma14="http://schemas.microsoft.com/office/mac/drawingml/2011/main" val="1"/>
             </a:ext>
           </a:extLst>
         </p:spPr>
@@ -1196,7 +1196,7 @@
           </a:ln>
           <a:extLst>
             <a:ext uri="{C572A759-6A51-4108-AA02-DFA0A04FC94B}">
-              <ma14:wrappingTextBoxFlag xmlns:ma14="http://schemas.microsoft.com/office/mac/drawingml/2011/main" xmlns:a14="http://schemas.microsoft.com/office/drawing/2010/main" xmlns:m="http://schemas.openxmlformats.org/officeDocument/2006/math" xmlns="" val="1"/>
+              <ma14:wrappingTextBoxFlag xmlns="" xmlns:m="http://schemas.openxmlformats.org/officeDocument/2006/math" xmlns:a14="http://schemas.microsoft.com/office/drawing/2010/main" xmlns:ma14="http://schemas.microsoft.com/office/mac/drawingml/2011/main" val="1"/>
             </a:ext>
           </a:extLst>
         </p:spPr>
@@ -1235,7 +1235,7 @@
           </a:ln>
           <a:extLst>
             <a:ext uri="{C572A759-6A51-4108-AA02-DFA0A04FC94B}">
-              <ma14:wrappingTextBoxFlag xmlns:ma14="http://schemas.microsoft.com/office/mac/drawingml/2011/main" xmlns:a14="http://schemas.microsoft.com/office/drawing/2010/main" xmlns:m="http://schemas.openxmlformats.org/officeDocument/2006/math" xmlns="" val="1"/>
+              <ma14:wrappingTextBoxFlag xmlns="" xmlns:m="http://schemas.openxmlformats.org/officeDocument/2006/math" xmlns:a14="http://schemas.microsoft.com/office/drawing/2010/main" xmlns:ma14="http://schemas.microsoft.com/office/mac/drawingml/2011/main" val="1"/>
             </a:ext>
           </a:extLst>
         </p:spPr>
@@ -2137,7 +2137,7 @@
           <a:p>
             <a:r>
               <a:rPr lang="en-US" sz="8000" dirty="0"/>
-              <a:t>CYB003-101 Study PD Analyses: BP and Hallucination</a:t>
+              <a:t>CYB003-101 Study PKPD Analyses: BP and Hallucination</a:t>
             </a:r>
             <a:endParaRPr sz="8000" dirty="0"/>
           </a:p>
@@ -2209,7 +2209,7 @@
           </a:ln>
           <a:extLst>
             <a:ext uri="{C572A759-6A51-4108-AA02-DFA0A04FC94B}">
-              <ma14:wrappingTextBoxFlag xmlns:ma14="http://schemas.microsoft.com/office/mac/drawingml/2011/main" xmlns:a14="http://schemas.microsoft.com/office/drawing/2010/main" xmlns:m="http://schemas.openxmlformats.org/officeDocument/2006/math" xmlns="" val="1"/>
+              <ma14:wrappingTextBoxFlag xmlns="" xmlns:m="http://schemas.openxmlformats.org/officeDocument/2006/math" xmlns:a14="http://schemas.microsoft.com/office/drawing/2010/main" xmlns:ma14="http://schemas.microsoft.com/office/mac/drawingml/2011/main" val="1"/>
             </a:ext>
           </a:extLst>
         </p:spPr>
@@ -2611,7 +2611,7 @@
           </a:prstGeom>
           <a:extLst>
             <a:ext uri="{C572A759-6A51-4108-AA02-DFA0A04FC94B}">
-              <ma14:wrappingTextBoxFlag xmlns:ma14="http://schemas.microsoft.com/office/mac/drawingml/2011/main" xmlns:a14="http://schemas.microsoft.com/office/drawing/2010/main" xmlns:m="http://schemas.openxmlformats.org/officeDocument/2006/math" xmlns="" val="1"/>
+              <ma14:wrappingTextBoxFlag xmlns="" xmlns:m="http://schemas.openxmlformats.org/officeDocument/2006/math" xmlns:a14="http://schemas.microsoft.com/office/drawing/2010/main" xmlns:ma14="http://schemas.microsoft.com/office/mac/drawingml/2011/main" val="1"/>
             </a:ext>
           </a:extLst>
         </p:spPr>
@@ -2850,7 +2850,7 @@
           </a:prstGeom>
           <a:extLst>
             <a:ext uri="{C572A759-6A51-4108-AA02-DFA0A04FC94B}">
-              <ma14:wrappingTextBoxFlag xmlns:ma14="http://schemas.microsoft.com/office/mac/drawingml/2011/main" xmlns:a14="http://schemas.microsoft.com/office/drawing/2010/main" xmlns:m="http://schemas.openxmlformats.org/officeDocument/2006/math" xmlns="" val="1"/>
+              <ma14:wrappingTextBoxFlag xmlns="" xmlns:m="http://schemas.openxmlformats.org/officeDocument/2006/math" xmlns:a14="http://schemas.microsoft.com/office/drawing/2010/main" xmlns:ma14="http://schemas.microsoft.com/office/mac/drawingml/2011/main" val="1"/>
             </a:ext>
           </a:extLst>
         </p:spPr>
@@ -3092,12 +3092,12 @@
         <p:spPr/>
         <p:txBody>
           <a:bodyPr>
-            <a:normAutofit fontScale="90000"/>
+            <a:normAutofit/>
           </a:bodyPr>
           <a:lstStyle/>
           <a:p>
             <a:r>
-              <a:rPr lang="en-US" dirty="0"/>
+              <a:rPr lang="en-US" sz="6600" dirty="0"/>
               <a:t>Two Analyses: Why the Trends are Opposite?</a:t>
             </a:r>
           </a:p>
@@ -3235,11 +3235,13 @@
         </p:nvSpPr>
         <p:spPr/>
         <p:txBody>
-          <a:bodyPr/>
+          <a:bodyPr>
+            <a:normAutofit/>
+          </a:bodyPr>
           <a:lstStyle/>
           <a:p>
             <a:r>
-              <a:rPr lang="en-US" dirty="0"/>
+              <a:rPr lang="en-US" sz="7200" dirty="0"/>
               <a:t>Conclusions and Key Takeaways</a:t>
             </a:r>
           </a:p>
@@ -3327,7 +3329,7 @@
           </a:ln>
           <a:extLst>
             <a:ext uri="{C572A759-6A51-4108-AA02-DFA0A04FC94B}">
-              <ma14:wrappingTextBoxFlag xmlns:ma14="http://schemas.microsoft.com/office/mac/drawingml/2011/main" xmlns:a14="http://schemas.microsoft.com/office/drawing/2010/main" xmlns:m="http://schemas.openxmlformats.org/officeDocument/2006/math" xmlns="" val="1"/>
+              <ma14:wrappingTextBoxFlag xmlns="" xmlns:m="http://schemas.openxmlformats.org/officeDocument/2006/math" xmlns:a14="http://schemas.microsoft.com/office/drawing/2010/main" xmlns:ma14="http://schemas.microsoft.com/office/mac/drawingml/2011/main" val="1"/>
             </a:ext>
           </a:extLst>
         </p:spPr>
@@ -3999,60 +4001,164 @@
         </p:nvSpPr>
         <p:spPr/>
         <p:txBody>
-          <a:bodyPr/>
+          <a:bodyPr>
+            <a:noAutofit/>
+          </a:bodyPr>
           <a:lstStyle/>
           <a:p>
-            <a:endParaRPr lang="en-US"/>
+            <a:r>
+              <a:rPr lang="en-US" sz="6600" dirty="0"/>
+              <a:t>Subject 01-033: Longest Visual Hallucination in the Study</a:t>
+            </a:r>
           </a:p>
         </p:txBody>
       </p:sp>
-      <p:sp>
-        <p:nvSpPr>
-          <p:cNvPr id="3" name="Text Placeholder 2">
+      <p:pic>
+        <p:nvPicPr>
+          <p:cNvPr id="6" name="Picture 5">
             <a:extLst>
               <a:ext uri="{FF2B5EF4-FFF2-40B4-BE49-F238E27FC236}">
-                <a16:creationId xmlns:a16="http://schemas.microsoft.com/office/drawing/2014/main" id="{C1CBEBDB-E39C-0585-1166-F0F9E55A13D9}"/>
+                <a16:creationId xmlns:a16="http://schemas.microsoft.com/office/drawing/2014/main" id="{5A79C914-7BDD-1BD2-8DE9-35AA491CA6A3}"/>
               </a:ext>
             </a:extLst>
           </p:cNvPr>
-          <p:cNvSpPr>
-            <a:spLocks noGrp="1"/>
-          </p:cNvSpPr>
-          <p:nvPr>
-            <p:ph type="body" sz="quarter" idx="21"/>
-          </p:nvPr>
-        </p:nvSpPr>
-        <p:spPr/>
-        <p:txBody>
-          <a:bodyPr/>
-          <a:lstStyle/>
-          <a:p>
-            <a:endParaRPr lang="en-US"/>
-          </a:p>
-        </p:txBody>
-      </p:sp>
+          <p:cNvPicPr>
+            <a:picLocks noChangeAspect="1"/>
+          </p:cNvPicPr>
+          <p:nvPr/>
+        </p:nvPicPr>
+        <p:blipFill>
+          <a:blip r:embed="rId2">
+            <a:extLst>
+              <a:ext uri="{28A0092B-C50C-407E-A947-70E740481C1C}">
+                <a14:useLocalDpi xmlns:a14="http://schemas.microsoft.com/office/drawing/2010/main" val="0"/>
+              </a:ext>
+            </a:extLst>
+          </a:blip>
+          <a:stretch>
+            <a:fillRect/>
+          </a:stretch>
+        </p:blipFill>
+        <p:spPr>
+          <a:xfrm>
+            <a:off x="1206500" y="3328360"/>
+            <a:ext cx="12188952" cy="6500775"/>
+          </a:xfrm>
+          <a:prstGeom prst="rect">
+            <a:avLst/>
+          </a:prstGeom>
+        </p:spPr>
+      </p:pic>
       <p:sp>
         <p:nvSpPr>
-          <p:cNvPr id="4" name="Text Placeholder 3">
+          <p:cNvPr id="8" name="TextBox 7">
             <a:extLst>
               <a:ext uri="{FF2B5EF4-FFF2-40B4-BE49-F238E27FC236}">
-                <a16:creationId xmlns:a16="http://schemas.microsoft.com/office/drawing/2014/main" id="{BBE409AB-1047-C528-ECFC-A77B1316DE3B}"/>
+                <a16:creationId xmlns:a16="http://schemas.microsoft.com/office/drawing/2014/main" id="{AE624109-0E83-8202-952E-1A857901DD94}"/>
               </a:ext>
             </a:extLst>
           </p:cNvPr>
-          <p:cNvSpPr>
-            <a:spLocks noGrp="1"/>
-          </p:cNvSpPr>
-          <p:nvPr>
-            <p:ph type="body" idx="1"/>
-          </p:nvPr>
+          <p:cNvSpPr txBox="1"/>
+          <p:nvPr/>
         </p:nvSpPr>
-        <p:spPr/>
+        <p:spPr>
+          <a:xfrm>
+            <a:off x="13395452" y="2512663"/>
+            <a:ext cx="10465816" cy="9381030"/>
+          </a:xfrm>
+          <a:prstGeom prst="rect">
+            <a:avLst/>
+          </a:prstGeom>
+          <a:noFill/>
+          <a:ln w="12700" cap="flat">
+            <a:noFill/>
+            <a:miter lim="400000"/>
+          </a:ln>
+          <a:effectLst/>
+          <a:sp3d/>
+        </p:spPr>
+        <p:style>
+          <a:lnRef idx="0">
+            <a:scrgbClr r="0" g="0" b="0"/>
+          </a:lnRef>
+          <a:fillRef idx="0">
+            <a:scrgbClr r="0" g="0" b="0"/>
+          </a:fillRef>
+          <a:effectRef idx="0">
+            <a:scrgbClr r="0" g="0" b="0"/>
+          </a:effectRef>
+          <a:fontRef idx="none"/>
+        </p:style>
         <p:txBody>
-          <a:bodyPr/>
+          <a:bodyPr wrap="square">
+            <a:spAutoFit/>
+          </a:bodyPr>
           <a:lstStyle/>
           <a:p>
-            <a:endParaRPr lang="en-US"/>
+            <a:pPr marL="571500" indent="-571500">
+              <a:buFont typeface="Arial" panose="020B0604020202020204" pitchFamily="34" charset="0"/>
+              <a:buChar char="•"/>
+            </a:pPr>
+            <a:r>
+              <a:rPr lang="en-US" sz="3600" dirty="0"/>
+              <a:t>Subject: 55 y White male, healthy volunteer; 63.1 kg, BMI 21.2</a:t>
+            </a:r>
+          </a:p>
+          <a:p>
+            <a:pPr marL="571500" indent="-571500">
+              <a:buFont typeface="Arial" panose="020B0604020202020204" pitchFamily="34" charset="0"/>
+              <a:buChar char="•"/>
+            </a:pPr>
+            <a:r>
+              <a:rPr lang="en-US" sz="3600" dirty="0"/>
+              <a:t>Event: Longest visual hallucination in study -~10.7 h (onset 0.6 h, resolved 11.3 h post-dose); mild, drug-related, resolved same day, no treatment</a:t>
+            </a:r>
+          </a:p>
+          <a:p>
+            <a:pPr marL="571500" indent="-571500">
+              <a:buFont typeface="Arial" panose="020B0604020202020204" pitchFamily="34" charset="0"/>
+              <a:buChar char="•"/>
+            </a:pPr>
+            <a:r>
+              <a:rPr lang="en-US" sz="3600" dirty="0"/>
+              <a:t>Also: Mild euphoric mood (~1.9–3.9 h post-dose), overlapping the peak</a:t>
+            </a:r>
+          </a:p>
+          <a:p>
+            <a:pPr marL="571500" indent="-571500">
+              <a:buFont typeface="Arial" panose="020B0604020202020204" pitchFamily="34" charset="0"/>
+              <a:buChar char="•"/>
+            </a:pPr>
+            <a:r>
+              <a:rPr lang="en-US" sz="3600" dirty="0"/>
+              <a:t>Exposure: </a:t>
+            </a:r>
+            <a:r>
+              <a:rPr lang="en-US" sz="3600" dirty="0" err="1"/>
+              <a:t>Cmax</a:t>
+            </a:r>
+            <a:r>
+              <a:rPr lang="en-US" sz="3600" dirty="0"/>
+              <a:t> 26.8 ng/mL (≈ study average) but late </a:t>
+            </a:r>
+            <a:r>
+              <a:rPr lang="en-US" sz="3600" dirty="0" err="1"/>
+              <a:t>Tmax</a:t>
+            </a:r>
+            <a:r>
+              <a:rPr lang="en-US" sz="3600" dirty="0"/>
+              <a:t> 4 h, long t½ 5.9 h → delayed, sustained exposure</a:t>
+            </a:r>
+          </a:p>
+          <a:p>
+            <a:pPr marL="571500" indent="-571500">
+              <a:buFont typeface="Arial" panose="020B0604020202020204" pitchFamily="34" charset="0"/>
+              <a:buChar char="•"/>
+            </a:pPr>
+            <a:r>
+              <a:rPr lang="en-US" sz="3600" dirty="0"/>
+              <a:t>Blood pressure: Transient rise tracking drug concentration - SBP +28 mmHg (peak 146 at 4 h), DBP +11; back to/below baseline by 24 h</a:t>
+            </a:r>
           </a:p>
         </p:txBody>
       </p:sp>
@@ -6211,12 +6317,14 @@
 </file>
 
 <file path=customXml/item1.xml><?xml version="1.0" encoding="utf-8"?>
-<?mso-contentType ?>
-<FormTemplates xmlns="http://schemas.microsoft.com/sharepoint/v3/contenttype/forms">
-  <Display>DocumentLibraryForm</Display>
-  <Edit>DocumentLibraryForm</Edit>
-  <New>DocumentLibraryForm</New>
-</FormTemplates>
+<p:properties xmlns:p="http://schemas.microsoft.com/office/2006/metadata/properties" xmlns:xsi="http://www.w3.org/2001/XMLSchema-instance" xmlns:pc="http://schemas.microsoft.com/office/infopath/2007/PartnerControls">
+  <documentManagement>
+    <lcf76f155ced4ddcb4097134ff3c332f xmlns="2696679f-3037-4848-b30b-2f1e1974b63b">
+      <Terms xmlns="http://schemas.microsoft.com/office/infopath/2007/PartnerControls"/>
+    </lcf76f155ced4ddcb4097134ff3c332f>
+    <TaxCatchAll xmlns="49d4e230-cd4d-48af-adc7-fa24bd8e7671" xsi:nil="true"/>
+  </documentManagement>
+</p:properties>
 </file>
 
 <file path=customXml/item2.xml><?xml version="1.0" encoding="utf-8"?>
@@ -6461,20 +6569,21 @@
 </file>
 
 <file path=customXml/item3.xml><?xml version="1.0" encoding="utf-8"?>
-<p:properties xmlns:p="http://schemas.microsoft.com/office/2006/metadata/properties" xmlns:xsi="http://www.w3.org/2001/XMLSchema-instance" xmlns:pc="http://schemas.microsoft.com/office/infopath/2007/PartnerControls">
-  <documentManagement>
-    <lcf76f155ced4ddcb4097134ff3c332f xmlns="2696679f-3037-4848-b30b-2f1e1974b63b">
-      <Terms xmlns="http://schemas.microsoft.com/office/infopath/2007/PartnerControls"/>
-    </lcf76f155ced4ddcb4097134ff3c332f>
-    <TaxCatchAll xmlns="49d4e230-cd4d-48af-adc7-fa24bd8e7671" xsi:nil="true"/>
-  </documentManagement>
-</p:properties>
+<?mso-contentType ?>
+<FormTemplates xmlns="http://schemas.microsoft.com/sharepoint/v3/contenttype/forms">
+  <Display>DocumentLibraryForm</Display>
+  <Edit>DocumentLibraryForm</Edit>
+  <New>DocumentLibraryForm</New>
+</FormTemplates>
 </file>
 
 <file path=customXml/itemProps1.xml><?xml version="1.0" encoding="utf-8"?>
-<ds:datastoreItem xmlns:ds="http://schemas.openxmlformats.org/officeDocument/2006/customXml" ds:itemID="{C57E4127-4626-47F3-8B68-4734069CC7B6}">
+<ds:datastoreItem xmlns:ds="http://schemas.openxmlformats.org/officeDocument/2006/customXml" ds:itemID="{9220DD9F-A85A-4FDC-ACC5-8F89D7E6E2E8}">
   <ds:schemaRefs>
-    <ds:schemaRef ds:uri="http://schemas.microsoft.com/sharepoint/v3/contenttype/forms"/>
+    <ds:schemaRef ds:uri="http://schemas.microsoft.com/office/2006/metadata/properties"/>
+    <ds:schemaRef ds:uri="http://schemas.microsoft.com/office/infopath/2007/PartnerControls"/>
+    <ds:schemaRef ds:uri="2696679f-3037-4848-b30b-2f1e1974b63b"/>
+    <ds:schemaRef ds:uri="49d4e230-cd4d-48af-adc7-fa24bd8e7671"/>
   </ds:schemaRefs>
 </ds:datastoreItem>
 </file>
@@ -6499,12 +6608,9 @@
 </file>
 
 <file path=customXml/itemProps3.xml><?xml version="1.0" encoding="utf-8"?>
-<ds:datastoreItem xmlns:ds="http://schemas.openxmlformats.org/officeDocument/2006/customXml" ds:itemID="{9220DD9F-A85A-4FDC-ACC5-8F89D7E6E2E8}">
+<ds:datastoreItem xmlns:ds="http://schemas.openxmlformats.org/officeDocument/2006/customXml" ds:itemID="{C57E4127-4626-47F3-8B68-4734069CC7B6}">
   <ds:schemaRefs>
-    <ds:schemaRef ds:uri="http://schemas.microsoft.com/office/2006/metadata/properties"/>
-    <ds:schemaRef ds:uri="http://schemas.microsoft.com/office/infopath/2007/PartnerControls"/>
-    <ds:schemaRef ds:uri="2696679f-3037-4848-b30b-2f1e1974b63b"/>
-    <ds:schemaRef ds:uri="49d4e230-cd4d-48af-adc7-fa24bd8e7671"/>
+    <ds:schemaRef ds:uri="http://schemas.microsoft.com/sharepoint/v3/contenttype/forms"/>
   </ds:schemaRefs>
 </ds:datastoreItem>
 </file>
--- a/ClinPharmForum_081826.pptx
+++ b/ClinPharmForum_081826.pptx
@@ -3133,7 +3133,7 @@
           <a:p>
             <a:r>
               <a:rPr lang="en-US" sz="5100" dirty="0"/>
-              <a:t>Within-subject SBP data show 31/32 individual patients exhibit strong day 1 corrected SBP increase with CYB003 concentration</a:t>
+              <a:t>Within-subject SBP data show 31/33 individual patients exhibit strong day 1 corrected SBP increase with CYB003 concentration</a:t>
             </a:r>
           </a:p>
           <a:p>
@@ -3157,10 +3157,10 @@
       </p:sp>
       <p:pic>
         <p:nvPicPr>
-          <p:cNvPr id="7" name="Picture 6">
+          <p:cNvPr id="5" name="Picture 4">
             <a:extLst>
               <a:ext uri="{FF2B5EF4-FFF2-40B4-BE49-F238E27FC236}">
-                <a16:creationId xmlns:a16="http://schemas.microsoft.com/office/drawing/2014/main" id="{4F3AF309-CEFF-7C83-828F-56F0BCF07803}"/>
+                <a16:creationId xmlns:a16="http://schemas.microsoft.com/office/drawing/2014/main" id="{AD3DA0A4-16FD-E2F5-5287-B30F184E23ED}"/>
               </a:ext>
             </a:extLst>
           </p:cNvPr>
@@ -3170,16 +3170,21 @@
           <p:nvPr/>
         </p:nvPicPr>
         <p:blipFill>
-          <a:blip r:embed="rId2"/>
-          <a:srcRect/>
+          <a:blip r:embed="rId2">
+            <a:extLst>
+              <a:ext uri="{28A0092B-C50C-407E-A947-70E740481C1C}">
+                <a14:useLocalDpi xmlns:a14="http://schemas.microsoft.com/office/drawing/2010/main" val="0"/>
+              </a:ext>
+            </a:extLst>
+          </a:blip>
           <a:stretch>
             <a:fillRect/>
           </a:stretch>
         </p:blipFill>
-        <p:spPr bwMode="auto">
+        <p:spPr>
           <a:xfrm>
-            <a:off x="2144962" y="2512663"/>
-            <a:ext cx="19718313" cy="7552367"/>
+            <a:off x="2144962" y="2377441"/>
+            <a:ext cx="19483711" cy="7468756"/>
           </a:xfrm>
           <a:prstGeom prst="rect">
             <a:avLst/>
